--- a/content/lessons/electron-configuration/btec-unit-1-chemistry-electron-configuration.pptx
+++ b/content/lessons/electron-configuration/btec-unit-1-chemistry-electron-configuration.pptx
@@ -5374,8 +5374,8 @@
         </p:nvSpPr>
         <p:spPr>
           <a:xfrm>
-            <a:off x="0" y="2880360"/>
-            <a:ext cx="12191695" cy="73152"/>
+            <a:off x="0" y="0"/>
+            <a:ext cx="146304" cy="6858000"/>
           </a:xfrm>
           <a:prstGeom prst="rect">
             <a:avLst/>
@@ -5417,8 +5417,160 @@
         </p:nvSpPr>
         <p:spPr>
           <a:xfrm>
+            <a:off x="640080" y="384048"/>
+            <a:ext cx="10972800" cy="868680"/>
+          </a:xfrm>
+          <a:prstGeom prst="rect">
+            <a:avLst/>
+          </a:prstGeom>
+          <a:noFill/>
+        </p:spPr>
+        <p:txBody>
+          <a:bodyPr wrap="square" anchor="t"/>
+          <a:lstStyle/>
+          <a:p>
+            <a:pPr algn="l"/>
+            <a:r>
+              <a:rPr sz="3000" b="1" i="0" a:ea="Calibri">
+                <a:solidFill>
+                  <a:srgbClr val="FFFFFF"/>
+                </a:solidFill>
+                <a:latin typeface="Calibri"/>
+              </a:rPr>
+              <a:t>Subshells and orbitals</a:t>
+            </a:r>
+          </a:p>
+        </p:txBody>
+      </p:sp>
+      <p:sp>
+        <p:nvSpPr>
+          <p:cNvPr id="5" name="TextBox 4"/>
+          <p:cNvSpPr txBox="1"/>
+          <p:nvPr/>
+        </p:nvSpPr>
+        <p:spPr>
+          <a:xfrm>
+            <a:off x="640080" y="1261872"/>
+            <a:ext cx="10972800" cy="502920"/>
+          </a:xfrm>
+          <a:prstGeom prst="rect">
+            <a:avLst/>
+          </a:prstGeom>
+          <a:noFill/>
+        </p:spPr>
+        <p:txBody>
+          <a:bodyPr wrap="square" anchor="t"/>
+          <a:lstStyle/>
+          <a:p>
+            <a:pPr algn="l"/>
+            <a:r>
+              <a:rPr sz="1700" b="0" i="0" a:ea="Calibri">
+                <a:solidFill>
+                  <a:srgbClr val="CCFBF1"/>
+                </a:solidFill>
+                <a:latin typeface="Calibri"/>
+              </a:rPr>
+              <a:t>Why 2,8,8 is not the whole story</a:t>
+            </a:r>
+          </a:p>
+        </p:txBody>
+      </p:sp>
+      <p:sp>
+        <p:nvSpPr>
+          <p:cNvPr id="6" name="Rounded Rectangle 5"/>
+          <p:cNvSpPr/>
+          <p:nvPr/>
+        </p:nvSpPr>
+        <p:spPr>
+          <a:xfrm>
             <a:off x="640080" y="1965960"/>
-            <a:ext cx="10881360" cy="914400"/>
+            <a:ext cx="3520440" cy="3977639"/>
+          </a:xfrm>
+          <a:prstGeom prst="roundRect">
+            <a:avLst/>
+          </a:prstGeom>
+          <a:solidFill>
+            <a:srgbClr val="003D33"/>
+          </a:solidFill>
+          <a:ln>
+            <a:noFill/>
+          </a:ln>
+        </p:spPr>
+        <p:style>
+          <a:lnRef idx="1">
+            <a:schemeClr val="accent1"/>
+          </a:lnRef>
+          <a:fillRef idx="3">
+            <a:schemeClr val="accent1"/>
+          </a:fillRef>
+          <a:effectRef idx="2">
+            <a:schemeClr val="accent1"/>
+          </a:effectRef>
+          <a:fontRef idx="minor">
+            <a:schemeClr val="lt1"/>
+          </a:fontRef>
+        </p:style>
+        <p:txBody>
+          <a:bodyPr rtlCol="0" anchor="ctr"/>
+          <a:lstStyle/>
+          <a:p>
+            <a:pPr algn="ctr"/>
+          </a:p>
+        </p:txBody>
+      </p:sp>
+      <p:sp>
+        <p:nvSpPr>
+          <p:cNvPr id="7" name="Rectangle 6"/>
+          <p:cNvSpPr/>
+          <p:nvPr/>
+        </p:nvSpPr>
+        <p:spPr>
+          <a:xfrm>
+            <a:off x="640080" y="1965960"/>
+            <a:ext cx="3520440" cy="109728"/>
+          </a:xfrm>
+          <a:prstGeom prst="rect">
+            <a:avLst/>
+          </a:prstGeom>
+          <a:solidFill>
+            <a:srgbClr val="009688"/>
+          </a:solidFill>
+          <a:ln>
+            <a:noFill/>
+          </a:ln>
+        </p:spPr>
+        <p:style>
+          <a:lnRef idx="1">
+            <a:schemeClr val="accent1"/>
+          </a:lnRef>
+          <a:fillRef idx="3">
+            <a:schemeClr val="accent1"/>
+          </a:fillRef>
+          <a:effectRef idx="2">
+            <a:schemeClr val="accent1"/>
+          </a:effectRef>
+          <a:fontRef idx="minor">
+            <a:schemeClr val="lt1"/>
+          </a:fontRef>
+        </p:style>
+        <p:txBody>
+          <a:bodyPr rtlCol="0" anchor="ctr"/>
+          <a:lstStyle/>
+          <a:p>
+            <a:pPr algn="ctr"/>
+          </a:p>
+        </p:txBody>
+      </p:sp>
+      <p:sp>
+        <p:nvSpPr>
+          <p:cNvPr id="8" name="TextBox 7"/>
+          <p:cNvSpPr txBox="1"/>
+          <p:nvPr/>
+        </p:nvSpPr>
+        <p:spPr>
+          <a:xfrm>
+            <a:off x="841248" y="2212848"/>
+            <a:ext cx="3108960" cy="457200"/>
           </a:xfrm>
           <a:prstGeom prst="rect">
             <a:avLst/>
@@ -5431,27 +5583,146 @@
           <a:p>
             <a:pPr algn="l"/>
             <a:r>
-              <a:rPr sz="3400" b="1" i="0" a:ea="Calibri">
+              <a:rPr sz="1600" b="1" i="0" a:ea="Calibri">
+                <a:solidFill>
+                  <a:srgbClr val="CCFBF1"/>
+                </a:solidFill>
+                <a:latin typeface="Calibri"/>
+              </a:rPr>
+              <a:t>1   Look for</a:t>
+            </a:r>
+          </a:p>
+        </p:txBody>
+      </p:sp>
+      <p:sp>
+        <p:nvSpPr>
+          <p:cNvPr id="9" name="TextBox 8"/>
+          <p:cNvSpPr txBox="1"/>
+          <p:nvPr/>
+        </p:nvSpPr>
+        <p:spPr>
+          <a:xfrm>
+            <a:off x="841248" y="2788920"/>
+            <a:ext cx="3108960" cy="2880360"/>
+          </a:xfrm>
+          <a:prstGeom prst="rect">
+            <a:avLst/>
+          </a:prstGeom>
+          <a:noFill/>
+        </p:spPr>
+        <p:txBody>
+          <a:bodyPr wrap="square" anchor="t"/>
+          <a:lstStyle/>
+          <a:p>
+            <a:pPr algn="l"/>
+            <a:r>
+              <a:rPr sz="1600" b="0" i="0" a:ea="Calibri">
                 <a:solidFill>
                   <a:srgbClr val="FFFFFF"/>
                 </a:solidFill>
                 <a:latin typeface="Calibri"/>
               </a:rPr>
-              <a:t>Subshells and orbitals</a:t>
-            </a:r>
-          </a:p>
-        </p:txBody>
-      </p:sp>
-      <p:sp>
-        <p:nvSpPr>
-          <p:cNvPr id="5" name="TextBox 4"/>
-          <p:cNvSpPr txBox="1"/>
-          <p:nvPr/>
-        </p:nvSpPr>
-        <p:spPr>
-          <a:xfrm>
-            <a:off x="640080" y="3154680"/>
-            <a:ext cx="10881360" cy="822960"/>
+              <a:t>s, p and d capacities: 2, 6 and 10. Boxes with spin arrows.</a:t>
+            </a:r>
+          </a:p>
+        </p:txBody>
+      </p:sp>
+      <p:sp>
+        <p:nvSpPr>
+          <p:cNvPr id="10" name="Rounded Rectangle 9"/>
+          <p:cNvSpPr/>
+          <p:nvPr/>
+        </p:nvSpPr>
+        <p:spPr>
+          <a:xfrm>
+            <a:off x="4343400" y="1965960"/>
+            <a:ext cx="3520440" cy="3977639"/>
+          </a:xfrm>
+          <a:prstGeom prst="roundRect">
+            <a:avLst/>
+          </a:prstGeom>
+          <a:solidFill>
+            <a:srgbClr val="003D33"/>
+          </a:solidFill>
+          <a:ln>
+            <a:noFill/>
+          </a:ln>
+        </p:spPr>
+        <p:style>
+          <a:lnRef idx="1">
+            <a:schemeClr val="accent1"/>
+          </a:lnRef>
+          <a:fillRef idx="3">
+            <a:schemeClr val="accent1"/>
+          </a:fillRef>
+          <a:effectRef idx="2">
+            <a:schemeClr val="accent1"/>
+          </a:effectRef>
+          <a:fontRef idx="minor">
+            <a:schemeClr val="lt1"/>
+          </a:fontRef>
+        </p:style>
+        <p:txBody>
+          <a:bodyPr rtlCol="0" anchor="ctr"/>
+          <a:lstStyle/>
+          <a:p>
+            <a:pPr algn="ctr"/>
+          </a:p>
+        </p:txBody>
+      </p:sp>
+      <p:sp>
+        <p:nvSpPr>
+          <p:cNvPr id="11" name="Rectangle 10"/>
+          <p:cNvSpPr/>
+          <p:nvPr/>
+        </p:nvSpPr>
+        <p:spPr>
+          <a:xfrm>
+            <a:off x="4343400" y="1965960"/>
+            <a:ext cx="3520440" cy="109728"/>
+          </a:xfrm>
+          <a:prstGeom prst="rect">
+            <a:avLst/>
+          </a:prstGeom>
+          <a:solidFill>
+            <a:srgbClr val="99F6E4"/>
+          </a:solidFill>
+          <a:ln>
+            <a:noFill/>
+          </a:ln>
+        </p:spPr>
+        <p:style>
+          <a:lnRef idx="1">
+            <a:schemeClr val="accent1"/>
+          </a:lnRef>
+          <a:fillRef idx="3">
+            <a:schemeClr val="accent1"/>
+          </a:fillRef>
+          <a:effectRef idx="2">
+            <a:schemeClr val="accent1"/>
+          </a:effectRef>
+          <a:fontRef idx="minor">
+            <a:schemeClr val="lt1"/>
+          </a:fontRef>
+        </p:style>
+        <p:txBody>
+          <a:bodyPr rtlCol="0" anchor="ctr"/>
+          <a:lstStyle/>
+          <a:p>
+            <a:pPr algn="ctr"/>
+          </a:p>
+        </p:txBody>
+      </p:sp>
+      <p:sp>
+        <p:nvSpPr>
+          <p:cNvPr id="12" name="TextBox 11"/>
+          <p:cNvSpPr txBox="1"/>
+          <p:nvPr/>
+        </p:nvSpPr>
+        <p:spPr>
+          <a:xfrm>
+            <a:off x="4544568" y="2212848"/>
+            <a:ext cx="3108960" cy="457200"/>
           </a:xfrm>
           <a:prstGeom prst="rect">
             <a:avLst/>
@@ -5464,20 +5735,259 @@
           <a:p>
             <a:pPr algn="l"/>
             <a:r>
-              <a:rPr sz="1800" b="0" i="0" a:ea="Calibri">
+              <a:rPr sz="1600" b="1" i="0" a:ea="Calibri">
                 <a:solidFill>
                   <a:srgbClr val="CCFBF1"/>
                 </a:solidFill>
                 <a:latin typeface="Calibri"/>
               </a:rPr>
-              <a:t>Why 2,8,8 is not the whole story</a:t>
-            </a:r>
-          </a:p>
-        </p:txBody>
-      </p:sp>
-      <p:sp>
-        <p:nvSpPr>
-          <p:cNvPr id="6" name="Rectangle 5"/>
+              <a:t>2   Say in full</a:t>
+            </a:r>
+          </a:p>
+        </p:txBody>
+      </p:sp>
+      <p:sp>
+        <p:nvSpPr>
+          <p:cNvPr id="13" name="TextBox 12"/>
+          <p:cNvSpPr txBox="1"/>
+          <p:nvPr/>
+        </p:nvSpPr>
+        <p:spPr>
+          <a:xfrm>
+            <a:off x="4544568" y="2788920"/>
+            <a:ext cx="3108960" cy="2880360"/>
+          </a:xfrm>
+          <a:prstGeom prst="rect">
+            <a:avLst/>
+          </a:prstGeom>
+          <a:noFill/>
+        </p:spPr>
+        <p:txBody>
+          <a:bodyPr wrap="square" anchor="t"/>
+          <a:lstStyle/>
+          <a:p>
+            <a:pPr algn="l"/>
+            <a:r>
+              <a:rPr sz="1600" b="0" i="0" a:ea="Calibri">
+                <a:solidFill>
+                  <a:srgbClr val="FFFFFF"/>
+                </a:solidFill>
+                <a:latin typeface="Calibri"/>
+              </a:rPr>
+              <a:t>Oxygen is 1s</a:t>
+            </a:r>
+            <a:r>
+              <a:rPr sz="1600" b="0" i="0" a:ea="Calibri" baseline="30000">
+                <a:solidFill>
+                  <a:srgbClr val="FFFFFF"/>
+                </a:solidFill>
+                <a:latin typeface="Calibri"/>
+              </a:rPr>
+              <a:t>2</a:t>
+            </a:r>
+            <a:r>
+              <a:rPr sz="1600" b="0" i="0" a:ea="Calibri">
+                <a:solidFill>
+                  <a:srgbClr val="FFFFFF"/>
+                </a:solidFill>
+                <a:latin typeface="Calibri"/>
+              </a:rPr>
+              <a:t> 2s</a:t>
+            </a:r>
+            <a:r>
+              <a:rPr sz="1600" b="0" i="0" a:ea="Calibri" baseline="30000">
+                <a:solidFill>
+                  <a:srgbClr val="FFFFFF"/>
+                </a:solidFill>
+                <a:latin typeface="Calibri"/>
+              </a:rPr>
+              <a:t>2</a:t>
+            </a:r>
+            <a:r>
+              <a:rPr sz="1600" b="0" i="0" a:ea="Calibri">
+                <a:solidFill>
+                  <a:srgbClr val="FFFFFF"/>
+                </a:solidFill>
+                <a:latin typeface="Calibri"/>
+              </a:rPr>
+              <a:t> 2p</a:t>
+            </a:r>
+            <a:r>
+              <a:rPr sz="1600" b="0" i="0" a:ea="Calibri" baseline="30000">
+                <a:solidFill>
+                  <a:srgbClr val="FFFFFF"/>
+                </a:solidFill>
+                <a:latin typeface="Calibri"/>
+              </a:rPr>
+              <a:t>4</a:t>
+            </a:r>
+            <a:r>
+              <a:rPr sz="1600" b="0" i="0" a:ea="Calibri">
+                <a:solidFill>
+                  <a:srgbClr val="FFFFFF"/>
+                </a:solidFill>
+                <a:latin typeface="Calibri"/>
+              </a:rPr>
+              <a:t> — four electrons in 2p, not four p subshells.</a:t>
+            </a:r>
+          </a:p>
+        </p:txBody>
+      </p:sp>
+      <p:sp>
+        <p:nvSpPr>
+          <p:cNvPr id="14" name="Rounded Rectangle 13"/>
+          <p:cNvSpPr/>
+          <p:nvPr/>
+        </p:nvSpPr>
+        <p:spPr>
+          <a:xfrm>
+            <a:off x="8046720" y="1965960"/>
+            <a:ext cx="3520440" cy="3977639"/>
+          </a:xfrm>
+          <a:prstGeom prst="roundRect">
+            <a:avLst/>
+          </a:prstGeom>
+          <a:solidFill>
+            <a:srgbClr val="003D33"/>
+          </a:solidFill>
+          <a:ln>
+            <a:noFill/>
+          </a:ln>
+        </p:spPr>
+        <p:style>
+          <a:lnRef idx="1">
+            <a:schemeClr val="accent1"/>
+          </a:lnRef>
+          <a:fillRef idx="3">
+            <a:schemeClr val="accent1"/>
+          </a:fillRef>
+          <a:effectRef idx="2">
+            <a:schemeClr val="accent1"/>
+          </a:effectRef>
+          <a:fontRef idx="minor">
+            <a:schemeClr val="lt1"/>
+          </a:fontRef>
+        </p:style>
+        <p:txBody>
+          <a:bodyPr rtlCol="0" anchor="ctr"/>
+          <a:lstStyle/>
+          <a:p>
+            <a:pPr algn="ctr"/>
+          </a:p>
+        </p:txBody>
+      </p:sp>
+      <p:sp>
+        <p:nvSpPr>
+          <p:cNvPr id="15" name="Rectangle 14"/>
+          <p:cNvSpPr/>
+          <p:nvPr/>
+        </p:nvSpPr>
+        <p:spPr>
+          <a:xfrm>
+            <a:off x="8046720" y="1965960"/>
+            <a:ext cx="3520440" cy="109728"/>
+          </a:xfrm>
+          <a:prstGeom prst="rect">
+            <a:avLst/>
+          </a:prstGeom>
+          <a:solidFill>
+            <a:srgbClr val="5EEAD4"/>
+          </a:solidFill>
+          <a:ln>
+            <a:noFill/>
+          </a:ln>
+        </p:spPr>
+        <p:style>
+          <a:lnRef idx="1">
+            <a:schemeClr val="accent1"/>
+          </a:lnRef>
+          <a:fillRef idx="3">
+            <a:schemeClr val="accent1"/>
+          </a:fillRef>
+          <a:effectRef idx="2">
+            <a:schemeClr val="accent1"/>
+          </a:effectRef>
+          <a:fontRef idx="minor">
+            <a:schemeClr val="lt1"/>
+          </a:fontRef>
+        </p:style>
+        <p:txBody>
+          <a:bodyPr rtlCol="0" anchor="ctr"/>
+          <a:lstStyle/>
+          <a:p>
+            <a:pPr algn="ctr"/>
+          </a:p>
+        </p:txBody>
+      </p:sp>
+      <p:sp>
+        <p:nvSpPr>
+          <p:cNvPr id="16" name="TextBox 15"/>
+          <p:cNvSpPr txBox="1"/>
+          <p:nvPr/>
+        </p:nvSpPr>
+        <p:spPr>
+          <a:xfrm>
+            <a:off x="8247888" y="2212848"/>
+            <a:ext cx="3108960" cy="457200"/>
+          </a:xfrm>
+          <a:prstGeom prst="rect">
+            <a:avLst/>
+          </a:prstGeom>
+          <a:noFill/>
+        </p:spPr>
+        <p:txBody>
+          <a:bodyPr wrap="square" anchor="t"/>
+          <a:lstStyle/>
+          <a:p>
+            <a:pPr algn="l"/>
+            <a:r>
+              <a:rPr sz="1600" b="1" i="0" a:ea="Calibri">
+                <a:solidFill>
+                  <a:srgbClr val="CCFBF1"/>
+                </a:solidFill>
+                <a:latin typeface="Calibri"/>
+              </a:rPr>
+              <a:t>3   Level 3 move</a:t>
+            </a:r>
+          </a:p>
+        </p:txBody>
+      </p:sp>
+      <p:sp>
+        <p:nvSpPr>
+          <p:cNvPr id="17" name="TextBox 16"/>
+          <p:cNvSpPr txBox="1"/>
+          <p:nvPr/>
+        </p:nvSpPr>
+        <p:spPr>
+          <a:xfrm>
+            <a:off x="8247888" y="2788920"/>
+            <a:ext cx="3108960" cy="2880360"/>
+          </a:xfrm>
+          <a:prstGeom prst="rect">
+            <a:avLst/>
+          </a:prstGeom>
+          <a:noFill/>
+        </p:spPr>
+        <p:txBody>
+          <a:bodyPr wrap="square" anchor="t"/>
+          <a:lstStyle/>
+          <a:p>
+            <a:pPr algn="l"/>
+            <a:r>
+              <a:rPr sz="1600" b="0" i="0" a:ea="Calibri">
+                <a:solidFill>
+                  <a:srgbClr val="FFFFFF"/>
+                </a:solidFill>
+                <a:latin typeface="Calibri"/>
+              </a:rPr>
+              <a:t>Apply Aufbau, Pauli and Hund, then rewrite the ion configuration.</a:t>
+            </a:r>
+          </a:p>
+        </p:txBody>
+      </p:sp>
+      <p:sp>
+        <p:nvSpPr>
+          <p:cNvPr id="18" name="Rectangle 17"/>
           <p:cNvSpPr/>
           <p:nvPr/>
         </p:nvSpPr>
@@ -5520,7 +6030,7 @@
       </p:sp>
       <p:pic>
         <p:nvPicPr>
-          <p:cNvPr id="7" name="Picture 6" descr="jdscience-footer-logo.png"/>
+          <p:cNvPr id="19" name="Picture 18" descr="jdscience-footer-logo.png"/>
           <p:cNvPicPr>
             <a:picLocks noChangeAspect="1"/>
           </p:cNvPicPr>
@@ -5544,7 +6054,7 @@
       </p:pic>
       <p:sp>
         <p:nvSpPr>
-          <p:cNvPr id="8" name="TextBox 7"/>
+          <p:cNvPr id="20" name="TextBox 19"/>
           <p:cNvSpPr txBox="1"/>
           <p:nvPr/>
         </p:nvSpPr>
@@ -5577,7 +6087,7 @@
       </p:sp>
       <p:sp>
         <p:nvSpPr>
-          <p:cNvPr id="9" name="TextBox 8"/>
+          <p:cNvPr id="21" name="TextBox 20"/>
           <p:cNvSpPr txBox="1"/>
           <p:nvPr/>
         </p:nvSpPr>
@@ -5610,7 +6120,7 @@
       </p:sp>
       <p:sp>
         <p:nvSpPr>
-          <p:cNvPr id="10" name="TextBox 9"/>
+          <p:cNvPr id="22" name="TextBox 21"/>
           <p:cNvSpPr txBox="1"/>
           <p:nvPr/>
         </p:nvSpPr>
@@ -6811,8 +7321,8 @@
         </p:nvSpPr>
         <p:spPr>
           <a:xfrm>
-            <a:off x="6931152" y="1069848"/>
-            <a:ext cx="4617720" cy="685800"/>
+            <a:off x="6931152" y="1051560"/>
+            <a:ext cx="4617720" cy="722376"/>
           </a:xfrm>
           <a:prstGeom prst="rect">
             <a:avLst/>
@@ -6930,8 +7440,8 @@
         </p:nvSpPr>
         <p:spPr>
           <a:xfrm>
-            <a:off x="6931152" y="2029968"/>
-            <a:ext cx="4617720" cy="685800"/>
+            <a:off x="6931152" y="2011680"/>
+            <a:ext cx="4617720" cy="722376"/>
           </a:xfrm>
           <a:prstGeom prst="rect">
             <a:avLst/>
@@ -7049,8 +7559,8 @@
         </p:nvSpPr>
         <p:spPr>
           <a:xfrm>
-            <a:off x="6931152" y="2990088"/>
-            <a:ext cx="4617720" cy="685800"/>
+            <a:off x="6931152" y="2971800"/>
+            <a:ext cx="4617720" cy="722376"/>
           </a:xfrm>
           <a:prstGeom prst="rect">
             <a:avLst/>
@@ -7222,8 +7732,8 @@
         </p:nvSpPr>
         <p:spPr>
           <a:xfrm>
-            <a:off x="6931152" y="3950208"/>
-            <a:ext cx="4617720" cy="685800"/>
+            <a:off x="6931152" y="3931920"/>
+            <a:ext cx="4617720" cy="722376"/>
           </a:xfrm>
           <a:prstGeom prst="rect">
             <a:avLst/>
@@ -7449,8 +7959,8 @@
         </p:nvSpPr>
         <p:spPr>
           <a:xfrm>
-            <a:off x="6931152" y="4910328"/>
-            <a:ext cx="4617720" cy="685800"/>
+            <a:off x="6931152" y="4892040"/>
+            <a:ext cx="4617720" cy="722376"/>
           </a:xfrm>
           <a:prstGeom prst="rect">
             <a:avLst/>
@@ -9188,8 +9698,8 @@
         </p:nvSpPr>
         <p:spPr>
           <a:xfrm>
-            <a:off x="6931152" y="1069848"/>
-            <a:ext cx="4617720" cy="685800"/>
+            <a:off x="6931152" y="1051560"/>
+            <a:ext cx="4617720" cy="722376"/>
           </a:xfrm>
           <a:prstGeom prst="rect">
             <a:avLst/>
@@ -9307,8 +9817,8 @@
         </p:nvSpPr>
         <p:spPr>
           <a:xfrm>
-            <a:off x="6931152" y="2029968"/>
-            <a:ext cx="4617720" cy="685800"/>
+            <a:off x="6931152" y="2011680"/>
+            <a:ext cx="4617720" cy="722376"/>
           </a:xfrm>
           <a:prstGeom prst="rect">
             <a:avLst/>
@@ -9426,8 +9936,8 @@
         </p:nvSpPr>
         <p:spPr>
           <a:xfrm>
-            <a:off x="6931152" y="2990088"/>
-            <a:ext cx="4617720" cy="685800"/>
+            <a:off x="6931152" y="2971800"/>
+            <a:ext cx="4617720" cy="722376"/>
           </a:xfrm>
           <a:prstGeom prst="rect">
             <a:avLst/>
@@ -9545,8 +10055,8 @@
         </p:nvSpPr>
         <p:spPr>
           <a:xfrm>
-            <a:off x="6931152" y="3950208"/>
-            <a:ext cx="4617720" cy="685800"/>
+            <a:off x="6931152" y="3931920"/>
+            <a:ext cx="4617720" cy="722376"/>
           </a:xfrm>
           <a:prstGeom prst="rect">
             <a:avLst/>
@@ -9682,8 +10192,8 @@
         </p:nvSpPr>
         <p:spPr>
           <a:xfrm>
-            <a:off x="6931152" y="4910328"/>
-            <a:ext cx="4617720" cy="685800"/>
+            <a:off x="6931152" y="4892040"/>
+            <a:ext cx="4617720" cy="722376"/>
           </a:xfrm>
           <a:prstGeom prst="rect">
             <a:avLst/>
@@ -10051,7 +10561,7 @@
         <p:spPr>
           <a:xfrm>
             <a:off x="6675120" y="960120"/>
-            <a:ext cx="5029200" cy="1051560"/>
+            <a:ext cx="5029200" cy="1108710"/>
           </a:xfrm>
           <a:prstGeom prst="roundRect">
             <a:avLst/>
@@ -10094,7 +10604,7 @@
         <p:spPr>
           <a:xfrm>
             <a:off x="6675120" y="960120"/>
-            <a:ext cx="91440" cy="1051560"/>
+            <a:ext cx="91440" cy="1108710"/>
           </a:xfrm>
           <a:prstGeom prst="rect">
             <a:avLst/>
@@ -10136,8 +10646,8 @@
         </p:nvSpPr>
         <p:spPr>
           <a:xfrm>
-            <a:off x="6931152" y="1069848"/>
-            <a:ext cx="4617720" cy="868680"/>
+            <a:off x="6931152" y="1051560"/>
+            <a:ext cx="4617720" cy="962406"/>
           </a:xfrm>
           <a:prstGeom prst="rect">
             <a:avLst/>
@@ -10169,8 +10679,8 @@
         </p:nvSpPr>
         <p:spPr>
           <a:xfrm>
-            <a:off x="6675120" y="2103120"/>
-            <a:ext cx="5029200" cy="1051560"/>
+            <a:off x="6675120" y="2160270"/>
+            <a:ext cx="5029200" cy="1108710"/>
           </a:xfrm>
           <a:prstGeom prst="roundRect">
             <a:avLst/>
@@ -10212,8 +10722,8 @@
         </p:nvSpPr>
         <p:spPr>
           <a:xfrm>
-            <a:off x="6675120" y="2103120"/>
-            <a:ext cx="91440" cy="1051560"/>
+            <a:off x="6675120" y="2160270"/>
+            <a:ext cx="91440" cy="1108710"/>
           </a:xfrm>
           <a:prstGeom prst="rect">
             <a:avLst/>
@@ -10255,8 +10765,8 @@
         </p:nvSpPr>
         <p:spPr>
           <a:xfrm>
-            <a:off x="6931152" y="2212848"/>
-            <a:ext cx="4617720" cy="868680"/>
+            <a:off x="6931152" y="2251710"/>
+            <a:ext cx="4617720" cy="962406"/>
           </a:xfrm>
           <a:prstGeom prst="rect">
             <a:avLst/>
@@ -10288,8 +10798,8 @@
         </p:nvSpPr>
         <p:spPr>
           <a:xfrm>
-            <a:off x="6675120" y="3246120"/>
-            <a:ext cx="5029200" cy="1051560"/>
+            <a:off x="6675120" y="3360420"/>
+            <a:ext cx="5029200" cy="1108710"/>
           </a:xfrm>
           <a:prstGeom prst="roundRect">
             <a:avLst/>
@@ -10331,8 +10841,8 @@
         </p:nvSpPr>
         <p:spPr>
           <a:xfrm>
-            <a:off x="6675120" y="3246120"/>
-            <a:ext cx="91440" cy="1051560"/>
+            <a:off x="6675120" y="3360420"/>
+            <a:ext cx="91440" cy="1108710"/>
           </a:xfrm>
           <a:prstGeom prst="rect">
             <a:avLst/>
@@ -10374,8 +10884,8 @@
         </p:nvSpPr>
         <p:spPr>
           <a:xfrm>
-            <a:off x="6931152" y="3355848"/>
-            <a:ext cx="4617720" cy="868680"/>
+            <a:off x="6931152" y="3451860"/>
+            <a:ext cx="4617720" cy="962406"/>
           </a:xfrm>
           <a:prstGeom prst="rect">
             <a:avLst/>
@@ -10407,8 +10917,8 @@
         </p:nvSpPr>
         <p:spPr>
           <a:xfrm>
-            <a:off x="6675120" y="4389120"/>
-            <a:ext cx="5029200" cy="1051560"/>
+            <a:off x="6675120" y="4560570"/>
+            <a:ext cx="5029200" cy="1108710"/>
           </a:xfrm>
           <a:prstGeom prst="roundRect">
             <a:avLst/>
@@ -10450,8 +10960,8 @@
         </p:nvSpPr>
         <p:spPr>
           <a:xfrm>
-            <a:off x="6675120" y="4389120"/>
-            <a:ext cx="91440" cy="1051560"/>
+            <a:off x="6675120" y="4560570"/>
+            <a:ext cx="91440" cy="1108710"/>
           </a:xfrm>
           <a:prstGeom prst="rect">
             <a:avLst/>
@@ -10493,8 +11003,8 @@
         </p:nvSpPr>
         <p:spPr>
           <a:xfrm>
-            <a:off x="6931152" y="4498848"/>
-            <a:ext cx="4617720" cy="868680"/>
+            <a:off x="6931152" y="4652010"/>
+            <a:ext cx="4617720" cy="962406"/>
           </a:xfrm>
           <a:prstGeom prst="rect">
             <a:avLst/>
@@ -10829,7 +11339,7 @@
         <p:spPr>
           <a:xfrm>
             <a:off x="6675120" y="960120"/>
-            <a:ext cx="5029200" cy="1051560"/>
+            <a:ext cx="5029200" cy="1108710"/>
           </a:xfrm>
           <a:prstGeom prst="roundRect">
             <a:avLst/>
@@ -10872,7 +11382,7 @@
         <p:spPr>
           <a:xfrm>
             <a:off x="6675120" y="960120"/>
-            <a:ext cx="91440" cy="1051560"/>
+            <a:ext cx="91440" cy="1108710"/>
           </a:xfrm>
           <a:prstGeom prst="rect">
             <a:avLst/>
@@ -10914,8 +11424,8 @@
         </p:nvSpPr>
         <p:spPr>
           <a:xfrm>
-            <a:off x="6931152" y="1069848"/>
-            <a:ext cx="4617720" cy="868680"/>
+            <a:off x="6931152" y="1051560"/>
+            <a:ext cx="4617720" cy="962406"/>
           </a:xfrm>
           <a:prstGeom prst="rect">
             <a:avLst/>
@@ -10947,8 +11457,8 @@
         </p:nvSpPr>
         <p:spPr>
           <a:xfrm>
-            <a:off x="6675120" y="2103120"/>
-            <a:ext cx="5029200" cy="1051560"/>
+            <a:off x="6675120" y="2160270"/>
+            <a:ext cx="5029200" cy="1108710"/>
           </a:xfrm>
           <a:prstGeom prst="roundRect">
             <a:avLst/>
@@ -10990,8 +11500,8 @@
         </p:nvSpPr>
         <p:spPr>
           <a:xfrm>
-            <a:off x="6675120" y="2103120"/>
-            <a:ext cx="91440" cy="1051560"/>
+            <a:off x="6675120" y="2160270"/>
+            <a:ext cx="91440" cy="1108710"/>
           </a:xfrm>
           <a:prstGeom prst="rect">
             <a:avLst/>
@@ -11033,8 +11543,8 @@
         </p:nvSpPr>
         <p:spPr>
           <a:xfrm>
-            <a:off x="6931152" y="2212848"/>
-            <a:ext cx="4617720" cy="868680"/>
+            <a:off x="6931152" y="2251710"/>
+            <a:ext cx="4617720" cy="962406"/>
           </a:xfrm>
           <a:prstGeom prst="rect">
             <a:avLst/>
@@ -11084,8 +11594,8 @@
         </p:nvSpPr>
         <p:spPr>
           <a:xfrm>
-            <a:off x="6675120" y="3246120"/>
-            <a:ext cx="5029200" cy="1051560"/>
+            <a:off x="6675120" y="3360420"/>
+            <a:ext cx="5029200" cy="1108710"/>
           </a:xfrm>
           <a:prstGeom prst="roundRect">
             <a:avLst/>
@@ -11127,8 +11637,8 @@
         </p:nvSpPr>
         <p:spPr>
           <a:xfrm>
-            <a:off x="6675120" y="3246120"/>
-            <a:ext cx="91440" cy="1051560"/>
+            <a:off x="6675120" y="3360420"/>
+            <a:ext cx="91440" cy="1108710"/>
           </a:xfrm>
           <a:prstGeom prst="rect">
             <a:avLst/>
@@ -11170,8 +11680,8 @@
         </p:nvSpPr>
         <p:spPr>
           <a:xfrm>
-            <a:off x="6931152" y="3355848"/>
-            <a:ext cx="4617720" cy="868680"/>
+            <a:off x="6931152" y="3451860"/>
+            <a:ext cx="4617720" cy="962406"/>
           </a:xfrm>
           <a:prstGeom prst="rect">
             <a:avLst/>
@@ -11275,8 +11785,8 @@
         </p:nvSpPr>
         <p:spPr>
           <a:xfrm>
-            <a:off x="6675120" y="4389120"/>
-            <a:ext cx="5029200" cy="1051560"/>
+            <a:off x="6675120" y="4560570"/>
+            <a:ext cx="5029200" cy="1108710"/>
           </a:xfrm>
           <a:prstGeom prst="roundRect">
             <a:avLst/>
@@ -11318,8 +11828,8 @@
         </p:nvSpPr>
         <p:spPr>
           <a:xfrm>
-            <a:off x="6675120" y="4389120"/>
-            <a:ext cx="91440" cy="1051560"/>
+            <a:off x="6675120" y="4560570"/>
+            <a:ext cx="91440" cy="1108710"/>
           </a:xfrm>
           <a:prstGeom prst="rect">
             <a:avLst/>
@@ -11361,8 +11871,8 @@
         </p:nvSpPr>
         <p:spPr>
           <a:xfrm>
-            <a:off x="6931152" y="4498848"/>
-            <a:ext cx="4617720" cy="868680"/>
+            <a:off x="6931152" y="4652010"/>
+            <a:ext cx="4617720" cy="962406"/>
           </a:xfrm>
           <a:prstGeom prst="rect">
             <a:avLst/>
@@ -16641,7 +17151,7 @@
         <p:spPr>
           <a:xfrm>
             <a:off x="658368" y="2011680"/>
-            <a:ext cx="3249168" cy="3383280"/>
+            <a:ext cx="3249168" cy="1417320"/>
           </a:xfrm>
           <a:prstGeom prst="rect">
             <a:avLst/>
@@ -16685,7 +17195,212 @@
       </p:sp>
       <p:sp>
         <p:nvSpPr>
-          <p:cNvPr id="11" name="Rounded Rectangle 10"/>
+          <p:cNvPr id="11" name="TextBox 10"/>
+          <p:cNvSpPr txBox="1"/>
+          <p:nvPr/>
+        </p:nvSpPr>
+        <p:spPr>
+          <a:xfrm>
+            <a:off x="658368" y="3520440"/>
+            <a:ext cx="3249168" cy="256032"/>
+          </a:xfrm>
+          <a:prstGeom prst="rect">
+            <a:avLst/>
+          </a:prstGeom>
+          <a:noFill/>
+        </p:spPr>
+        <p:txBody>
+          <a:bodyPr wrap="square" anchor="t"/>
+          <a:lstStyle/>
+          <a:p>
+            <a:pPr algn="l"/>
+            <a:r>
+              <a:rPr sz="1100" b="1" i="0" a:ea="Calibri">
+                <a:solidFill>
+                  <a:srgbClr val="475569"/>
+                </a:solidFill>
+                <a:latin typeface="Calibri"/>
+              </a:rPr>
+              <a:t>Write a full-sentence answer</a:t>
+            </a:r>
+          </a:p>
+        </p:txBody>
+      </p:sp>
+      <p:sp>
+        <p:nvSpPr>
+          <p:cNvPr id="12" name="Rectangle 11"/>
+          <p:cNvSpPr/>
+          <p:nvPr/>
+        </p:nvSpPr>
+        <p:spPr>
+          <a:xfrm>
+            <a:off x="658368" y="3858768"/>
+            <a:ext cx="3249168" cy="15875"/>
+          </a:xfrm>
+          <a:prstGeom prst="rect">
+            <a:avLst/>
+          </a:prstGeom>
+          <a:solidFill>
+            <a:srgbClr val="E2E8F0"/>
+          </a:solidFill>
+          <a:ln>
+            <a:noFill/>
+          </a:ln>
+        </p:spPr>
+        <p:style>
+          <a:lnRef idx="1">
+            <a:schemeClr val="accent1"/>
+          </a:lnRef>
+          <a:fillRef idx="3">
+            <a:schemeClr val="accent1"/>
+          </a:fillRef>
+          <a:effectRef idx="2">
+            <a:schemeClr val="accent1"/>
+          </a:effectRef>
+          <a:fontRef idx="minor">
+            <a:schemeClr val="lt1"/>
+          </a:fontRef>
+        </p:style>
+        <p:txBody>
+          <a:bodyPr rtlCol="0" anchor="ctr"/>
+          <a:lstStyle/>
+          <a:p>
+            <a:pPr algn="ctr"/>
+          </a:p>
+        </p:txBody>
+      </p:sp>
+      <p:sp>
+        <p:nvSpPr>
+          <p:cNvPr id="13" name="Rectangle 12"/>
+          <p:cNvSpPr/>
+          <p:nvPr/>
+        </p:nvSpPr>
+        <p:spPr>
+          <a:xfrm>
+            <a:off x="658368" y="4151376"/>
+            <a:ext cx="3249168" cy="15875"/>
+          </a:xfrm>
+          <a:prstGeom prst="rect">
+            <a:avLst/>
+          </a:prstGeom>
+          <a:solidFill>
+            <a:srgbClr val="E2E8F0"/>
+          </a:solidFill>
+          <a:ln>
+            <a:noFill/>
+          </a:ln>
+        </p:spPr>
+        <p:style>
+          <a:lnRef idx="1">
+            <a:schemeClr val="accent1"/>
+          </a:lnRef>
+          <a:fillRef idx="3">
+            <a:schemeClr val="accent1"/>
+          </a:fillRef>
+          <a:effectRef idx="2">
+            <a:schemeClr val="accent1"/>
+          </a:effectRef>
+          <a:fontRef idx="minor">
+            <a:schemeClr val="lt1"/>
+          </a:fontRef>
+        </p:style>
+        <p:txBody>
+          <a:bodyPr rtlCol="0" anchor="ctr"/>
+          <a:lstStyle/>
+          <a:p>
+            <a:pPr algn="ctr"/>
+          </a:p>
+        </p:txBody>
+      </p:sp>
+      <p:sp>
+        <p:nvSpPr>
+          <p:cNvPr id="14" name="Rectangle 13"/>
+          <p:cNvSpPr/>
+          <p:nvPr/>
+        </p:nvSpPr>
+        <p:spPr>
+          <a:xfrm>
+            <a:off x="658368" y="4443984"/>
+            <a:ext cx="3249168" cy="15875"/>
+          </a:xfrm>
+          <a:prstGeom prst="rect">
+            <a:avLst/>
+          </a:prstGeom>
+          <a:solidFill>
+            <a:srgbClr val="E2E8F0"/>
+          </a:solidFill>
+          <a:ln>
+            <a:noFill/>
+          </a:ln>
+        </p:spPr>
+        <p:style>
+          <a:lnRef idx="1">
+            <a:schemeClr val="accent1"/>
+          </a:lnRef>
+          <a:fillRef idx="3">
+            <a:schemeClr val="accent1"/>
+          </a:fillRef>
+          <a:effectRef idx="2">
+            <a:schemeClr val="accent1"/>
+          </a:effectRef>
+          <a:fontRef idx="minor">
+            <a:schemeClr val="lt1"/>
+          </a:fontRef>
+        </p:style>
+        <p:txBody>
+          <a:bodyPr rtlCol="0" anchor="ctr"/>
+          <a:lstStyle/>
+          <a:p>
+            <a:pPr algn="ctr"/>
+          </a:p>
+        </p:txBody>
+      </p:sp>
+      <p:sp>
+        <p:nvSpPr>
+          <p:cNvPr id="15" name="Rectangle 14"/>
+          <p:cNvSpPr/>
+          <p:nvPr/>
+        </p:nvSpPr>
+        <p:spPr>
+          <a:xfrm>
+            <a:off x="658368" y="4736592"/>
+            <a:ext cx="3249168" cy="15875"/>
+          </a:xfrm>
+          <a:prstGeom prst="rect">
+            <a:avLst/>
+          </a:prstGeom>
+          <a:solidFill>
+            <a:srgbClr val="E2E8F0"/>
+          </a:solidFill>
+          <a:ln>
+            <a:noFill/>
+          </a:ln>
+        </p:spPr>
+        <p:style>
+          <a:lnRef idx="1">
+            <a:schemeClr val="accent1"/>
+          </a:lnRef>
+          <a:fillRef idx="3">
+            <a:schemeClr val="accent1"/>
+          </a:fillRef>
+          <a:effectRef idx="2">
+            <a:schemeClr val="accent1"/>
+          </a:effectRef>
+          <a:fontRef idx="minor">
+            <a:schemeClr val="lt1"/>
+          </a:fontRef>
+        </p:style>
+        <p:txBody>
+          <a:bodyPr rtlCol="0" anchor="ctr"/>
+          <a:lstStyle/>
+          <a:p>
+            <a:pPr algn="ctr"/>
+          </a:p>
+        </p:txBody>
+      </p:sp>
+      <p:sp>
+        <p:nvSpPr>
+          <p:cNvPr id="16" name="Rounded Rectangle 15"/>
           <p:cNvSpPr/>
           <p:nvPr/>
         </p:nvSpPr>
@@ -16728,7 +17443,7 @@
       </p:sp>
       <p:sp>
         <p:nvSpPr>
-          <p:cNvPr id="12" name="Rounded Rectangle 11"/>
+          <p:cNvPr id="17" name="Rounded Rectangle 16"/>
           <p:cNvSpPr/>
           <p:nvPr/>
         </p:nvSpPr>
@@ -16771,7 +17486,7 @@
       </p:sp>
       <p:sp>
         <p:nvSpPr>
-          <p:cNvPr id="13" name="TextBox 12"/>
+          <p:cNvPr id="18" name="TextBox 17"/>
           <p:cNvSpPr txBox="1"/>
           <p:nvPr/>
         </p:nvSpPr>
@@ -16804,7 +17519,7 @@
       </p:sp>
       <p:sp>
         <p:nvSpPr>
-          <p:cNvPr id="14" name="TextBox 13"/>
+          <p:cNvPr id="19" name="TextBox 18"/>
           <p:cNvSpPr txBox="1"/>
           <p:nvPr/>
         </p:nvSpPr>
@@ -16837,14 +17552,14 @@
       </p:sp>
       <p:sp>
         <p:nvSpPr>
-          <p:cNvPr id="15" name="TextBox 14"/>
+          <p:cNvPr id="20" name="TextBox 19"/>
           <p:cNvSpPr txBox="1"/>
           <p:nvPr/>
         </p:nvSpPr>
         <p:spPr>
           <a:xfrm>
             <a:off x="4456176" y="2011680"/>
-            <a:ext cx="3249168" cy="3383280"/>
+            <a:ext cx="3249168" cy="1417320"/>
           </a:xfrm>
           <a:prstGeom prst="rect">
             <a:avLst/>
@@ -16870,7 +17585,212 @@
       </p:sp>
       <p:sp>
         <p:nvSpPr>
-          <p:cNvPr id="16" name="Rounded Rectangle 15"/>
+          <p:cNvPr id="21" name="TextBox 20"/>
+          <p:cNvSpPr txBox="1"/>
+          <p:nvPr/>
+        </p:nvSpPr>
+        <p:spPr>
+          <a:xfrm>
+            <a:off x="4456176" y="3520440"/>
+            <a:ext cx="3249168" cy="256032"/>
+          </a:xfrm>
+          <a:prstGeom prst="rect">
+            <a:avLst/>
+          </a:prstGeom>
+          <a:noFill/>
+        </p:spPr>
+        <p:txBody>
+          <a:bodyPr wrap="square" anchor="t"/>
+          <a:lstStyle/>
+          <a:p>
+            <a:pPr algn="l"/>
+            <a:r>
+              <a:rPr sz="1100" b="1" i="0" a:ea="Calibri">
+                <a:solidFill>
+                  <a:srgbClr val="475569"/>
+                </a:solidFill>
+                <a:latin typeface="Calibri"/>
+              </a:rPr>
+              <a:t>Write a full-sentence answer</a:t>
+            </a:r>
+          </a:p>
+        </p:txBody>
+      </p:sp>
+      <p:sp>
+        <p:nvSpPr>
+          <p:cNvPr id="22" name="Rectangle 21"/>
+          <p:cNvSpPr/>
+          <p:nvPr/>
+        </p:nvSpPr>
+        <p:spPr>
+          <a:xfrm>
+            <a:off x="4456176" y="3858768"/>
+            <a:ext cx="3249168" cy="15875"/>
+          </a:xfrm>
+          <a:prstGeom prst="rect">
+            <a:avLst/>
+          </a:prstGeom>
+          <a:solidFill>
+            <a:srgbClr val="E2E8F0"/>
+          </a:solidFill>
+          <a:ln>
+            <a:noFill/>
+          </a:ln>
+        </p:spPr>
+        <p:style>
+          <a:lnRef idx="1">
+            <a:schemeClr val="accent1"/>
+          </a:lnRef>
+          <a:fillRef idx="3">
+            <a:schemeClr val="accent1"/>
+          </a:fillRef>
+          <a:effectRef idx="2">
+            <a:schemeClr val="accent1"/>
+          </a:effectRef>
+          <a:fontRef idx="minor">
+            <a:schemeClr val="lt1"/>
+          </a:fontRef>
+        </p:style>
+        <p:txBody>
+          <a:bodyPr rtlCol="0" anchor="ctr"/>
+          <a:lstStyle/>
+          <a:p>
+            <a:pPr algn="ctr"/>
+          </a:p>
+        </p:txBody>
+      </p:sp>
+      <p:sp>
+        <p:nvSpPr>
+          <p:cNvPr id="23" name="Rectangle 22"/>
+          <p:cNvSpPr/>
+          <p:nvPr/>
+        </p:nvSpPr>
+        <p:spPr>
+          <a:xfrm>
+            <a:off x="4456176" y="4151376"/>
+            <a:ext cx="3249168" cy="15875"/>
+          </a:xfrm>
+          <a:prstGeom prst="rect">
+            <a:avLst/>
+          </a:prstGeom>
+          <a:solidFill>
+            <a:srgbClr val="E2E8F0"/>
+          </a:solidFill>
+          <a:ln>
+            <a:noFill/>
+          </a:ln>
+        </p:spPr>
+        <p:style>
+          <a:lnRef idx="1">
+            <a:schemeClr val="accent1"/>
+          </a:lnRef>
+          <a:fillRef idx="3">
+            <a:schemeClr val="accent1"/>
+          </a:fillRef>
+          <a:effectRef idx="2">
+            <a:schemeClr val="accent1"/>
+          </a:effectRef>
+          <a:fontRef idx="minor">
+            <a:schemeClr val="lt1"/>
+          </a:fontRef>
+        </p:style>
+        <p:txBody>
+          <a:bodyPr rtlCol="0" anchor="ctr"/>
+          <a:lstStyle/>
+          <a:p>
+            <a:pPr algn="ctr"/>
+          </a:p>
+        </p:txBody>
+      </p:sp>
+      <p:sp>
+        <p:nvSpPr>
+          <p:cNvPr id="24" name="Rectangle 23"/>
+          <p:cNvSpPr/>
+          <p:nvPr/>
+        </p:nvSpPr>
+        <p:spPr>
+          <a:xfrm>
+            <a:off x="4456176" y="4443984"/>
+            <a:ext cx="3249168" cy="15875"/>
+          </a:xfrm>
+          <a:prstGeom prst="rect">
+            <a:avLst/>
+          </a:prstGeom>
+          <a:solidFill>
+            <a:srgbClr val="E2E8F0"/>
+          </a:solidFill>
+          <a:ln>
+            <a:noFill/>
+          </a:ln>
+        </p:spPr>
+        <p:style>
+          <a:lnRef idx="1">
+            <a:schemeClr val="accent1"/>
+          </a:lnRef>
+          <a:fillRef idx="3">
+            <a:schemeClr val="accent1"/>
+          </a:fillRef>
+          <a:effectRef idx="2">
+            <a:schemeClr val="accent1"/>
+          </a:effectRef>
+          <a:fontRef idx="minor">
+            <a:schemeClr val="lt1"/>
+          </a:fontRef>
+        </p:style>
+        <p:txBody>
+          <a:bodyPr rtlCol="0" anchor="ctr"/>
+          <a:lstStyle/>
+          <a:p>
+            <a:pPr algn="ctr"/>
+          </a:p>
+        </p:txBody>
+      </p:sp>
+      <p:sp>
+        <p:nvSpPr>
+          <p:cNvPr id="25" name="Rectangle 24"/>
+          <p:cNvSpPr/>
+          <p:nvPr/>
+        </p:nvSpPr>
+        <p:spPr>
+          <a:xfrm>
+            <a:off x="4456176" y="4736592"/>
+            <a:ext cx="3249168" cy="15875"/>
+          </a:xfrm>
+          <a:prstGeom prst="rect">
+            <a:avLst/>
+          </a:prstGeom>
+          <a:solidFill>
+            <a:srgbClr val="E2E8F0"/>
+          </a:solidFill>
+          <a:ln>
+            <a:noFill/>
+          </a:ln>
+        </p:spPr>
+        <p:style>
+          <a:lnRef idx="1">
+            <a:schemeClr val="accent1"/>
+          </a:lnRef>
+          <a:fillRef idx="3">
+            <a:schemeClr val="accent1"/>
+          </a:fillRef>
+          <a:effectRef idx="2">
+            <a:schemeClr val="accent1"/>
+          </a:effectRef>
+          <a:fontRef idx="minor">
+            <a:schemeClr val="lt1"/>
+          </a:fontRef>
+        </p:style>
+        <p:txBody>
+          <a:bodyPr rtlCol="0" anchor="ctr"/>
+          <a:lstStyle/>
+          <a:p>
+            <a:pPr algn="ctr"/>
+          </a:p>
+        </p:txBody>
+      </p:sp>
+      <p:sp>
+        <p:nvSpPr>
+          <p:cNvPr id="26" name="Rounded Rectangle 25"/>
           <p:cNvSpPr/>
           <p:nvPr/>
         </p:nvSpPr>
@@ -16913,7 +17833,7 @@
       </p:sp>
       <p:sp>
         <p:nvSpPr>
-          <p:cNvPr id="17" name="Rounded Rectangle 16"/>
+          <p:cNvPr id="27" name="Rounded Rectangle 26"/>
           <p:cNvSpPr/>
           <p:nvPr/>
         </p:nvSpPr>
@@ -16956,7 +17876,7 @@
       </p:sp>
       <p:sp>
         <p:nvSpPr>
-          <p:cNvPr id="18" name="TextBox 17"/>
+          <p:cNvPr id="28" name="TextBox 27"/>
           <p:cNvSpPr txBox="1"/>
           <p:nvPr/>
         </p:nvSpPr>
@@ -16989,7 +17909,7 @@
       </p:sp>
       <p:sp>
         <p:nvSpPr>
-          <p:cNvPr id="19" name="TextBox 18"/>
+          <p:cNvPr id="29" name="TextBox 28"/>
           <p:cNvSpPr txBox="1"/>
           <p:nvPr/>
         </p:nvSpPr>
@@ -17022,14 +17942,14 @@
       </p:sp>
       <p:sp>
         <p:nvSpPr>
-          <p:cNvPr id="20" name="TextBox 19"/>
+          <p:cNvPr id="30" name="TextBox 29"/>
           <p:cNvSpPr txBox="1"/>
           <p:nvPr/>
         </p:nvSpPr>
         <p:spPr>
           <a:xfrm>
             <a:off x="8253984" y="2011680"/>
-            <a:ext cx="3249168" cy="3383280"/>
+            <a:ext cx="3249168" cy="1417320"/>
           </a:xfrm>
           <a:prstGeom prst="rect">
             <a:avLst/>
@@ -17055,7 +17975,212 @@
       </p:sp>
       <p:sp>
         <p:nvSpPr>
-          <p:cNvPr id="21" name="TextBox 20"/>
+          <p:cNvPr id="31" name="TextBox 30"/>
+          <p:cNvSpPr txBox="1"/>
+          <p:nvPr/>
+        </p:nvSpPr>
+        <p:spPr>
+          <a:xfrm>
+            <a:off x="8253984" y="3520440"/>
+            <a:ext cx="3249168" cy="256032"/>
+          </a:xfrm>
+          <a:prstGeom prst="rect">
+            <a:avLst/>
+          </a:prstGeom>
+          <a:noFill/>
+        </p:spPr>
+        <p:txBody>
+          <a:bodyPr wrap="square" anchor="t"/>
+          <a:lstStyle/>
+          <a:p>
+            <a:pPr algn="l"/>
+            <a:r>
+              <a:rPr sz="1100" b="1" i="0" a:ea="Calibri">
+                <a:solidFill>
+                  <a:srgbClr val="475569"/>
+                </a:solidFill>
+                <a:latin typeface="Calibri"/>
+              </a:rPr>
+              <a:t>Write a full-sentence answer</a:t>
+            </a:r>
+          </a:p>
+        </p:txBody>
+      </p:sp>
+      <p:sp>
+        <p:nvSpPr>
+          <p:cNvPr id="32" name="Rectangle 31"/>
+          <p:cNvSpPr/>
+          <p:nvPr/>
+        </p:nvSpPr>
+        <p:spPr>
+          <a:xfrm>
+            <a:off x="8253984" y="3858768"/>
+            <a:ext cx="3249168" cy="15875"/>
+          </a:xfrm>
+          <a:prstGeom prst="rect">
+            <a:avLst/>
+          </a:prstGeom>
+          <a:solidFill>
+            <a:srgbClr val="E2E8F0"/>
+          </a:solidFill>
+          <a:ln>
+            <a:noFill/>
+          </a:ln>
+        </p:spPr>
+        <p:style>
+          <a:lnRef idx="1">
+            <a:schemeClr val="accent1"/>
+          </a:lnRef>
+          <a:fillRef idx="3">
+            <a:schemeClr val="accent1"/>
+          </a:fillRef>
+          <a:effectRef idx="2">
+            <a:schemeClr val="accent1"/>
+          </a:effectRef>
+          <a:fontRef idx="minor">
+            <a:schemeClr val="lt1"/>
+          </a:fontRef>
+        </p:style>
+        <p:txBody>
+          <a:bodyPr rtlCol="0" anchor="ctr"/>
+          <a:lstStyle/>
+          <a:p>
+            <a:pPr algn="ctr"/>
+          </a:p>
+        </p:txBody>
+      </p:sp>
+      <p:sp>
+        <p:nvSpPr>
+          <p:cNvPr id="33" name="Rectangle 32"/>
+          <p:cNvSpPr/>
+          <p:nvPr/>
+        </p:nvSpPr>
+        <p:spPr>
+          <a:xfrm>
+            <a:off x="8253984" y="4151376"/>
+            <a:ext cx="3249168" cy="15875"/>
+          </a:xfrm>
+          <a:prstGeom prst="rect">
+            <a:avLst/>
+          </a:prstGeom>
+          <a:solidFill>
+            <a:srgbClr val="E2E8F0"/>
+          </a:solidFill>
+          <a:ln>
+            <a:noFill/>
+          </a:ln>
+        </p:spPr>
+        <p:style>
+          <a:lnRef idx="1">
+            <a:schemeClr val="accent1"/>
+          </a:lnRef>
+          <a:fillRef idx="3">
+            <a:schemeClr val="accent1"/>
+          </a:fillRef>
+          <a:effectRef idx="2">
+            <a:schemeClr val="accent1"/>
+          </a:effectRef>
+          <a:fontRef idx="minor">
+            <a:schemeClr val="lt1"/>
+          </a:fontRef>
+        </p:style>
+        <p:txBody>
+          <a:bodyPr rtlCol="0" anchor="ctr"/>
+          <a:lstStyle/>
+          <a:p>
+            <a:pPr algn="ctr"/>
+          </a:p>
+        </p:txBody>
+      </p:sp>
+      <p:sp>
+        <p:nvSpPr>
+          <p:cNvPr id="34" name="Rectangle 33"/>
+          <p:cNvSpPr/>
+          <p:nvPr/>
+        </p:nvSpPr>
+        <p:spPr>
+          <a:xfrm>
+            <a:off x="8253984" y="4443984"/>
+            <a:ext cx="3249168" cy="15875"/>
+          </a:xfrm>
+          <a:prstGeom prst="rect">
+            <a:avLst/>
+          </a:prstGeom>
+          <a:solidFill>
+            <a:srgbClr val="E2E8F0"/>
+          </a:solidFill>
+          <a:ln>
+            <a:noFill/>
+          </a:ln>
+        </p:spPr>
+        <p:style>
+          <a:lnRef idx="1">
+            <a:schemeClr val="accent1"/>
+          </a:lnRef>
+          <a:fillRef idx="3">
+            <a:schemeClr val="accent1"/>
+          </a:fillRef>
+          <a:effectRef idx="2">
+            <a:schemeClr val="accent1"/>
+          </a:effectRef>
+          <a:fontRef idx="minor">
+            <a:schemeClr val="lt1"/>
+          </a:fontRef>
+        </p:style>
+        <p:txBody>
+          <a:bodyPr rtlCol="0" anchor="ctr"/>
+          <a:lstStyle/>
+          <a:p>
+            <a:pPr algn="ctr"/>
+          </a:p>
+        </p:txBody>
+      </p:sp>
+      <p:sp>
+        <p:nvSpPr>
+          <p:cNvPr id="35" name="Rectangle 34"/>
+          <p:cNvSpPr/>
+          <p:nvPr/>
+        </p:nvSpPr>
+        <p:spPr>
+          <a:xfrm>
+            <a:off x="8253984" y="4736592"/>
+            <a:ext cx="3249168" cy="15875"/>
+          </a:xfrm>
+          <a:prstGeom prst="rect">
+            <a:avLst/>
+          </a:prstGeom>
+          <a:solidFill>
+            <a:srgbClr val="E2E8F0"/>
+          </a:solidFill>
+          <a:ln>
+            <a:noFill/>
+          </a:ln>
+        </p:spPr>
+        <p:style>
+          <a:lnRef idx="1">
+            <a:schemeClr val="accent1"/>
+          </a:lnRef>
+          <a:fillRef idx="3">
+            <a:schemeClr val="accent1"/>
+          </a:fillRef>
+          <a:effectRef idx="2">
+            <a:schemeClr val="accent1"/>
+          </a:effectRef>
+          <a:fontRef idx="minor">
+            <a:schemeClr val="lt1"/>
+          </a:fontRef>
+        </p:style>
+        <p:txBody>
+          <a:bodyPr rtlCol="0" anchor="ctr"/>
+          <a:lstStyle/>
+          <a:p>
+            <a:pPr algn="ctr"/>
+          </a:p>
+        </p:txBody>
+      </p:sp>
+      <p:sp>
+        <p:nvSpPr>
+          <p:cNvPr id="36" name="TextBox 35"/>
           <p:cNvSpPr txBox="1"/>
           <p:nvPr/>
         </p:nvSpPr>
@@ -17088,7 +18213,7 @@
       </p:sp>
       <p:sp>
         <p:nvSpPr>
-          <p:cNvPr id="22" name="Rectangle 21"/>
+          <p:cNvPr id="37" name="Rectangle 36"/>
           <p:cNvSpPr/>
           <p:nvPr/>
         </p:nvSpPr>
@@ -17131,7 +18256,7 @@
       </p:sp>
       <p:pic>
         <p:nvPicPr>
-          <p:cNvPr id="23" name="Picture 22" descr="jdscience-footer-logo.png"/>
+          <p:cNvPr id="38" name="Picture 37" descr="jdscience-footer-logo.png"/>
           <p:cNvPicPr>
             <a:picLocks noChangeAspect="1"/>
           </p:cNvPicPr>
@@ -17155,7 +18280,7 @@
       </p:pic>
       <p:sp>
         <p:nvSpPr>
-          <p:cNvPr id="24" name="TextBox 23"/>
+          <p:cNvPr id="39" name="TextBox 38"/>
           <p:cNvSpPr txBox="1"/>
           <p:nvPr/>
         </p:nvSpPr>
@@ -17188,7 +18313,7 @@
       </p:sp>
       <p:sp>
         <p:nvSpPr>
-          <p:cNvPr id="25" name="TextBox 24"/>
+          <p:cNvPr id="40" name="TextBox 39"/>
           <p:cNvSpPr txBox="1"/>
           <p:nvPr/>
         </p:nvSpPr>
@@ -17221,7 +18346,7 @@
       </p:sp>
       <p:sp>
         <p:nvSpPr>
-          <p:cNvPr id="26" name="TextBox 25"/>
+          <p:cNvPr id="41" name="TextBox 40"/>
           <p:cNvSpPr txBox="1"/>
           <p:nvPr/>
         </p:nvSpPr>
@@ -22607,8 +23732,8 @@
         </p:nvSpPr>
         <p:spPr>
           <a:xfrm>
-            <a:off x="0" y="2880360"/>
-            <a:ext cx="12191695" cy="73152"/>
+            <a:off x="0" y="0"/>
+            <a:ext cx="146304" cy="6858000"/>
           </a:xfrm>
           <a:prstGeom prst="rect">
             <a:avLst/>
@@ -22650,8 +23775,160 @@
         </p:nvSpPr>
         <p:spPr>
           <a:xfrm>
+            <a:off x="640080" y="384048"/>
+            <a:ext cx="10972800" cy="868680"/>
+          </a:xfrm>
+          <a:prstGeom prst="rect">
+            <a:avLst/>
+          </a:prstGeom>
+          <a:noFill/>
+        </p:spPr>
+        <p:txBody>
+          <a:bodyPr wrap="square" anchor="t"/>
+          <a:lstStyle/>
+          <a:p>
+            <a:pPr algn="l"/>
+            <a:r>
+              <a:rPr sz="3000" b="1" i="0" a:ea="Calibri">
+                <a:solidFill>
+                  <a:srgbClr val="FFFFFF"/>
+                </a:solidFill>
+                <a:latin typeface="Calibri"/>
+              </a:rPr>
+              <a:t>Shells first</a:t>
+            </a:r>
+          </a:p>
+        </p:txBody>
+      </p:sp>
+      <p:sp>
+        <p:nvSpPr>
+          <p:cNvPr id="5" name="TextBox 4"/>
+          <p:cNvSpPr txBox="1"/>
+          <p:nvPr/>
+        </p:nvSpPr>
+        <p:spPr>
+          <a:xfrm>
+            <a:off x="640080" y="1261872"/>
+            <a:ext cx="10972800" cy="502920"/>
+          </a:xfrm>
+          <a:prstGeom prst="rect">
+            <a:avLst/>
+          </a:prstGeom>
+          <a:noFill/>
+        </p:spPr>
+        <p:txBody>
+          <a:bodyPr wrap="square" anchor="t"/>
+          <a:lstStyle/>
+          <a:p>
+            <a:pPr algn="l"/>
+            <a:r>
+              <a:rPr sz="1700" b="0" i="0" a:ea="Calibri">
+                <a:solidFill>
+                  <a:srgbClr val="CCFBF1"/>
+                </a:solidFill>
+                <a:latin typeface="Calibri"/>
+              </a:rPr>
+              <a:t>A useful model for the first 20 elements</a:t>
+            </a:r>
+          </a:p>
+        </p:txBody>
+      </p:sp>
+      <p:sp>
+        <p:nvSpPr>
+          <p:cNvPr id="6" name="Rounded Rectangle 5"/>
+          <p:cNvSpPr/>
+          <p:nvPr/>
+        </p:nvSpPr>
+        <p:spPr>
+          <a:xfrm>
             <a:off x="640080" y="1965960"/>
-            <a:ext cx="10881360" cy="914400"/>
+            <a:ext cx="3520440" cy="3977639"/>
+          </a:xfrm>
+          <a:prstGeom prst="roundRect">
+            <a:avLst/>
+          </a:prstGeom>
+          <a:solidFill>
+            <a:srgbClr val="003D33"/>
+          </a:solidFill>
+          <a:ln>
+            <a:noFill/>
+          </a:ln>
+        </p:spPr>
+        <p:style>
+          <a:lnRef idx="1">
+            <a:schemeClr val="accent1"/>
+          </a:lnRef>
+          <a:fillRef idx="3">
+            <a:schemeClr val="accent1"/>
+          </a:fillRef>
+          <a:effectRef idx="2">
+            <a:schemeClr val="accent1"/>
+          </a:effectRef>
+          <a:fontRef idx="minor">
+            <a:schemeClr val="lt1"/>
+          </a:fontRef>
+        </p:style>
+        <p:txBody>
+          <a:bodyPr rtlCol="0" anchor="ctr"/>
+          <a:lstStyle/>
+          <a:p>
+            <a:pPr algn="ctr"/>
+          </a:p>
+        </p:txBody>
+      </p:sp>
+      <p:sp>
+        <p:nvSpPr>
+          <p:cNvPr id="7" name="Rectangle 6"/>
+          <p:cNvSpPr/>
+          <p:nvPr/>
+        </p:nvSpPr>
+        <p:spPr>
+          <a:xfrm>
+            <a:off x="640080" y="1965960"/>
+            <a:ext cx="3520440" cy="109728"/>
+          </a:xfrm>
+          <a:prstGeom prst="rect">
+            <a:avLst/>
+          </a:prstGeom>
+          <a:solidFill>
+            <a:srgbClr val="009688"/>
+          </a:solidFill>
+          <a:ln>
+            <a:noFill/>
+          </a:ln>
+        </p:spPr>
+        <p:style>
+          <a:lnRef idx="1">
+            <a:schemeClr val="accent1"/>
+          </a:lnRef>
+          <a:fillRef idx="3">
+            <a:schemeClr val="accent1"/>
+          </a:fillRef>
+          <a:effectRef idx="2">
+            <a:schemeClr val="accent1"/>
+          </a:effectRef>
+          <a:fontRef idx="minor">
+            <a:schemeClr val="lt1"/>
+          </a:fontRef>
+        </p:style>
+        <p:txBody>
+          <a:bodyPr rtlCol="0" anchor="ctr"/>
+          <a:lstStyle/>
+          <a:p>
+            <a:pPr algn="ctr"/>
+          </a:p>
+        </p:txBody>
+      </p:sp>
+      <p:sp>
+        <p:nvSpPr>
+          <p:cNvPr id="8" name="TextBox 7"/>
+          <p:cNvSpPr txBox="1"/>
+          <p:nvPr/>
+        </p:nvSpPr>
+        <p:spPr>
+          <a:xfrm>
+            <a:off x="841248" y="2212848"/>
+            <a:ext cx="3108960" cy="457200"/>
           </a:xfrm>
           <a:prstGeom prst="rect">
             <a:avLst/>
@@ -22664,27 +23941,146 @@
           <a:p>
             <a:pPr algn="l"/>
             <a:r>
-              <a:rPr sz="3400" b="1" i="0" a:ea="Calibri">
+              <a:rPr sz="1600" b="1" i="0" a:ea="Calibri">
+                <a:solidFill>
+                  <a:srgbClr val="CCFBF1"/>
+                </a:solidFill>
+                <a:latin typeface="Calibri"/>
+              </a:rPr>
+              <a:t>1   Look for</a:t>
+            </a:r>
+          </a:p>
+        </p:txBody>
+      </p:sp>
+      <p:sp>
+        <p:nvSpPr>
+          <p:cNvPr id="9" name="TextBox 8"/>
+          <p:cNvSpPr txBox="1"/>
+          <p:nvPr/>
+        </p:nvSpPr>
+        <p:spPr>
+          <a:xfrm>
+            <a:off x="841248" y="2788920"/>
+            <a:ext cx="3108960" cy="2880360"/>
+          </a:xfrm>
+          <a:prstGeom prst="rect">
+            <a:avLst/>
+          </a:prstGeom>
+          <a:noFill/>
+        </p:spPr>
+        <p:txBody>
+          <a:bodyPr wrap="square" anchor="t"/>
+          <a:lstStyle/>
+          <a:p>
+            <a:pPr algn="l"/>
+            <a:r>
+              <a:rPr sz="1600" b="0" i="0" a:ea="Calibri">
                 <a:solidFill>
                   <a:srgbClr val="FFFFFF"/>
                 </a:solidFill>
                 <a:latin typeface="Calibri"/>
               </a:rPr>
-              <a:t>Shells first</a:t>
-            </a:r>
-          </a:p>
-        </p:txBody>
-      </p:sp>
-      <p:sp>
-        <p:nvSpPr>
-          <p:cNvPr id="5" name="TextBox 4"/>
-          <p:cNvSpPr txBox="1"/>
-          <p:nvPr/>
-        </p:nvSpPr>
-        <p:spPr>
-          <a:xfrm>
-            <a:off x="640080" y="3154680"/>
-            <a:ext cx="10881360" cy="822960"/>
+              <a:t>Maximum 2, then 8, then 8, then 2 — calcium is 2,8,8,2.</a:t>
+            </a:r>
+          </a:p>
+        </p:txBody>
+      </p:sp>
+      <p:sp>
+        <p:nvSpPr>
+          <p:cNvPr id="10" name="Rounded Rectangle 9"/>
+          <p:cNvSpPr/>
+          <p:nvPr/>
+        </p:nvSpPr>
+        <p:spPr>
+          <a:xfrm>
+            <a:off x="4343400" y="1965960"/>
+            <a:ext cx="3520440" cy="3977639"/>
+          </a:xfrm>
+          <a:prstGeom prst="roundRect">
+            <a:avLst/>
+          </a:prstGeom>
+          <a:solidFill>
+            <a:srgbClr val="003D33"/>
+          </a:solidFill>
+          <a:ln>
+            <a:noFill/>
+          </a:ln>
+        </p:spPr>
+        <p:style>
+          <a:lnRef idx="1">
+            <a:schemeClr val="accent1"/>
+          </a:lnRef>
+          <a:fillRef idx="3">
+            <a:schemeClr val="accent1"/>
+          </a:fillRef>
+          <a:effectRef idx="2">
+            <a:schemeClr val="accent1"/>
+          </a:effectRef>
+          <a:fontRef idx="minor">
+            <a:schemeClr val="lt1"/>
+          </a:fontRef>
+        </p:style>
+        <p:txBody>
+          <a:bodyPr rtlCol="0" anchor="ctr"/>
+          <a:lstStyle/>
+          <a:p>
+            <a:pPr algn="ctr"/>
+          </a:p>
+        </p:txBody>
+      </p:sp>
+      <p:sp>
+        <p:nvSpPr>
+          <p:cNvPr id="11" name="Rectangle 10"/>
+          <p:cNvSpPr/>
+          <p:nvPr/>
+        </p:nvSpPr>
+        <p:spPr>
+          <a:xfrm>
+            <a:off x="4343400" y="1965960"/>
+            <a:ext cx="3520440" cy="109728"/>
+          </a:xfrm>
+          <a:prstGeom prst="rect">
+            <a:avLst/>
+          </a:prstGeom>
+          <a:solidFill>
+            <a:srgbClr val="99F6E4"/>
+          </a:solidFill>
+          <a:ln>
+            <a:noFill/>
+          </a:ln>
+        </p:spPr>
+        <p:style>
+          <a:lnRef idx="1">
+            <a:schemeClr val="accent1"/>
+          </a:lnRef>
+          <a:fillRef idx="3">
+            <a:schemeClr val="accent1"/>
+          </a:fillRef>
+          <a:effectRef idx="2">
+            <a:schemeClr val="accent1"/>
+          </a:effectRef>
+          <a:fontRef idx="minor">
+            <a:schemeClr val="lt1"/>
+          </a:fontRef>
+        </p:style>
+        <p:txBody>
+          <a:bodyPr rtlCol="0" anchor="ctr"/>
+          <a:lstStyle/>
+          <a:p>
+            <a:pPr algn="ctr"/>
+          </a:p>
+        </p:txBody>
+      </p:sp>
+      <p:sp>
+        <p:nvSpPr>
+          <p:cNvPr id="12" name="TextBox 11"/>
+          <p:cNvSpPr txBox="1"/>
+          <p:nvPr/>
+        </p:nvSpPr>
+        <p:spPr>
+          <a:xfrm>
+            <a:off x="4544568" y="2212848"/>
+            <a:ext cx="3108960" cy="457200"/>
           </a:xfrm>
           <a:prstGeom prst="rect">
             <a:avLst/>
@@ -22697,20 +24093,205 @@
           <a:p>
             <a:pPr algn="l"/>
             <a:r>
-              <a:rPr sz="1800" b="0" i="0" a:ea="Calibri">
+              <a:rPr sz="1600" b="1" i="0" a:ea="Calibri">
                 <a:solidFill>
                   <a:srgbClr val="CCFBF1"/>
                 </a:solidFill>
                 <a:latin typeface="Calibri"/>
               </a:rPr>
-              <a:t>A useful model for the first 20 elements</a:t>
-            </a:r>
-          </a:p>
-        </p:txBody>
-      </p:sp>
-      <p:sp>
-        <p:nvSpPr>
-          <p:cNvPr id="6" name="Rectangle 5"/>
+              <a:t>2   Say in full</a:t>
+            </a:r>
+          </a:p>
+        </p:txBody>
+      </p:sp>
+      <p:sp>
+        <p:nvSpPr>
+          <p:cNvPr id="13" name="TextBox 12"/>
+          <p:cNvSpPr txBox="1"/>
+          <p:nvPr/>
+        </p:nvSpPr>
+        <p:spPr>
+          <a:xfrm>
+            <a:off x="4544568" y="2788920"/>
+            <a:ext cx="3108960" cy="2880360"/>
+          </a:xfrm>
+          <a:prstGeom prst="rect">
+            <a:avLst/>
+          </a:prstGeom>
+          <a:noFill/>
+        </p:spPr>
+        <p:txBody>
+          <a:bodyPr wrap="square" anchor="t"/>
+          <a:lstStyle/>
+          <a:p>
+            <a:pPr algn="l"/>
+            <a:r>
+              <a:rPr sz="1600" b="0" i="0" a:ea="Calibri">
+                <a:solidFill>
+                  <a:srgbClr val="FFFFFF"/>
+                </a:solidFill>
+                <a:latin typeface="Calibri"/>
+              </a:rPr>
+              <a:t>Electrons occupy the lowest available shell first.</a:t>
+            </a:r>
+          </a:p>
+        </p:txBody>
+      </p:sp>
+      <p:sp>
+        <p:nvSpPr>
+          <p:cNvPr id="14" name="Rounded Rectangle 13"/>
+          <p:cNvSpPr/>
+          <p:nvPr/>
+        </p:nvSpPr>
+        <p:spPr>
+          <a:xfrm>
+            <a:off x="8046720" y="1965960"/>
+            <a:ext cx="3520440" cy="3977639"/>
+          </a:xfrm>
+          <a:prstGeom prst="roundRect">
+            <a:avLst/>
+          </a:prstGeom>
+          <a:solidFill>
+            <a:srgbClr val="003D33"/>
+          </a:solidFill>
+          <a:ln>
+            <a:noFill/>
+          </a:ln>
+        </p:spPr>
+        <p:style>
+          <a:lnRef idx="1">
+            <a:schemeClr val="accent1"/>
+          </a:lnRef>
+          <a:fillRef idx="3">
+            <a:schemeClr val="accent1"/>
+          </a:fillRef>
+          <a:effectRef idx="2">
+            <a:schemeClr val="accent1"/>
+          </a:effectRef>
+          <a:fontRef idx="minor">
+            <a:schemeClr val="lt1"/>
+          </a:fontRef>
+        </p:style>
+        <p:txBody>
+          <a:bodyPr rtlCol="0" anchor="ctr"/>
+          <a:lstStyle/>
+          <a:p>
+            <a:pPr algn="ctr"/>
+          </a:p>
+        </p:txBody>
+      </p:sp>
+      <p:sp>
+        <p:nvSpPr>
+          <p:cNvPr id="15" name="Rectangle 14"/>
+          <p:cNvSpPr/>
+          <p:nvPr/>
+        </p:nvSpPr>
+        <p:spPr>
+          <a:xfrm>
+            <a:off x="8046720" y="1965960"/>
+            <a:ext cx="3520440" cy="109728"/>
+          </a:xfrm>
+          <a:prstGeom prst="rect">
+            <a:avLst/>
+          </a:prstGeom>
+          <a:solidFill>
+            <a:srgbClr val="5EEAD4"/>
+          </a:solidFill>
+          <a:ln>
+            <a:noFill/>
+          </a:ln>
+        </p:spPr>
+        <p:style>
+          <a:lnRef idx="1">
+            <a:schemeClr val="accent1"/>
+          </a:lnRef>
+          <a:fillRef idx="3">
+            <a:schemeClr val="accent1"/>
+          </a:fillRef>
+          <a:effectRef idx="2">
+            <a:schemeClr val="accent1"/>
+          </a:effectRef>
+          <a:fontRef idx="minor">
+            <a:schemeClr val="lt1"/>
+          </a:fontRef>
+        </p:style>
+        <p:txBody>
+          <a:bodyPr rtlCol="0" anchor="ctr"/>
+          <a:lstStyle/>
+          <a:p>
+            <a:pPr algn="ctr"/>
+          </a:p>
+        </p:txBody>
+      </p:sp>
+      <p:sp>
+        <p:nvSpPr>
+          <p:cNvPr id="16" name="TextBox 15"/>
+          <p:cNvSpPr txBox="1"/>
+          <p:nvPr/>
+        </p:nvSpPr>
+        <p:spPr>
+          <a:xfrm>
+            <a:off x="8247888" y="2212848"/>
+            <a:ext cx="3108960" cy="457200"/>
+          </a:xfrm>
+          <a:prstGeom prst="rect">
+            <a:avLst/>
+          </a:prstGeom>
+          <a:noFill/>
+        </p:spPr>
+        <p:txBody>
+          <a:bodyPr wrap="square" anchor="t"/>
+          <a:lstStyle/>
+          <a:p>
+            <a:pPr algn="l"/>
+            <a:r>
+              <a:rPr sz="1600" b="1" i="0" a:ea="Calibri">
+                <a:solidFill>
+                  <a:srgbClr val="CCFBF1"/>
+                </a:solidFill>
+                <a:latin typeface="Calibri"/>
+              </a:rPr>
+              <a:t>3   Level 3 move</a:t>
+            </a:r>
+          </a:p>
+        </p:txBody>
+      </p:sp>
+      <p:sp>
+        <p:nvSpPr>
+          <p:cNvPr id="17" name="TextBox 16"/>
+          <p:cNvSpPr txBox="1"/>
+          <p:nvPr/>
+        </p:nvSpPr>
+        <p:spPr>
+          <a:xfrm>
+            <a:off x="8247888" y="2788920"/>
+            <a:ext cx="3108960" cy="2880360"/>
+          </a:xfrm>
+          <a:prstGeom prst="rect">
+            <a:avLst/>
+          </a:prstGeom>
+          <a:noFill/>
+        </p:spPr>
+        <p:txBody>
+          <a:bodyPr wrap="square" anchor="t"/>
+          <a:lstStyle/>
+          <a:p>
+            <a:pPr algn="l"/>
+            <a:r>
+              <a:rPr sz="1600" b="0" i="0" a:ea="Calibri">
+                <a:solidFill>
+                  <a:srgbClr val="FFFFFF"/>
+                </a:solidFill>
+                <a:latin typeface="Calibri"/>
+              </a:rPr>
+              <a:t>This is the GCSE starting point. Subshells come next.</a:t>
+            </a:r>
+          </a:p>
+        </p:txBody>
+      </p:sp>
+      <p:sp>
+        <p:nvSpPr>
+          <p:cNvPr id="18" name="Rectangle 17"/>
           <p:cNvSpPr/>
           <p:nvPr/>
         </p:nvSpPr>
@@ -22753,7 +24334,7 @@
       </p:sp>
       <p:pic>
         <p:nvPicPr>
-          <p:cNvPr id="7" name="Picture 6" descr="jdscience-footer-logo.png"/>
+          <p:cNvPr id="19" name="Picture 18" descr="jdscience-footer-logo.png"/>
           <p:cNvPicPr>
             <a:picLocks noChangeAspect="1"/>
           </p:cNvPicPr>
@@ -22777,7 +24358,7 @@
       </p:pic>
       <p:sp>
         <p:nvSpPr>
-          <p:cNvPr id="8" name="TextBox 7"/>
+          <p:cNvPr id="20" name="TextBox 19"/>
           <p:cNvSpPr txBox="1"/>
           <p:nvPr/>
         </p:nvSpPr>
@@ -22810,7 +24391,7 @@
       </p:sp>
       <p:sp>
         <p:nvSpPr>
-          <p:cNvPr id="9" name="TextBox 8"/>
+          <p:cNvPr id="21" name="TextBox 20"/>
           <p:cNvSpPr txBox="1"/>
           <p:nvPr/>
         </p:nvSpPr>
@@ -22843,7 +24424,7 @@
       </p:sp>
       <p:sp>
         <p:nvSpPr>
-          <p:cNvPr id="10" name="TextBox 9"/>
+          <p:cNvPr id="22" name="TextBox 21"/>
           <p:cNvSpPr txBox="1"/>
           <p:nvPr/>
         </p:nvSpPr>
@@ -23001,7 +24582,7 @@
         <p:spPr>
           <a:xfrm>
             <a:off x="6675120" y="960120"/>
-            <a:ext cx="5029200" cy="1051560"/>
+            <a:ext cx="5029200" cy="1108710"/>
           </a:xfrm>
           <a:prstGeom prst="roundRect">
             <a:avLst/>
@@ -23044,7 +24625,7 @@
         <p:spPr>
           <a:xfrm>
             <a:off x="6675120" y="960120"/>
-            <a:ext cx="91440" cy="1051560"/>
+            <a:ext cx="91440" cy="1108710"/>
           </a:xfrm>
           <a:prstGeom prst="rect">
             <a:avLst/>
@@ -23086,8 +24667,8 @@
         </p:nvSpPr>
         <p:spPr>
           <a:xfrm>
-            <a:off x="6931152" y="1069848"/>
-            <a:ext cx="4617720" cy="868680"/>
+            <a:off x="6931152" y="1051560"/>
+            <a:ext cx="4617720" cy="962406"/>
           </a:xfrm>
           <a:prstGeom prst="rect">
             <a:avLst/>
@@ -23119,8 +24700,8 @@
         </p:nvSpPr>
         <p:spPr>
           <a:xfrm>
-            <a:off x="6675120" y="2103120"/>
-            <a:ext cx="5029200" cy="1051560"/>
+            <a:off x="6675120" y="2160270"/>
+            <a:ext cx="5029200" cy="1108710"/>
           </a:xfrm>
           <a:prstGeom prst="roundRect">
             <a:avLst/>
@@ -23162,8 +24743,8 @@
         </p:nvSpPr>
         <p:spPr>
           <a:xfrm>
-            <a:off x="6675120" y="2103120"/>
-            <a:ext cx="91440" cy="1051560"/>
+            <a:off x="6675120" y="2160270"/>
+            <a:ext cx="91440" cy="1108710"/>
           </a:xfrm>
           <a:prstGeom prst="rect">
             <a:avLst/>
@@ -23205,8 +24786,8 @@
         </p:nvSpPr>
         <p:spPr>
           <a:xfrm>
-            <a:off x="6931152" y="2212848"/>
-            <a:ext cx="4617720" cy="868680"/>
+            <a:off x="6931152" y="2251710"/>
+            <a:ext cx="4617720" cy="962406"/>
           </a:xfrm>
           <a:prstGeom prst="rect">
             <a:avLst/>
@@ -23238,8 +24819,8 @@
         </p:nvSpPr>
         <p:spPr>
           <a:xfrm>
-            <a:off x="6675120" y="3246120"/>
-            <a:ext cx="5029200" cy="1051560"/>
+            <a:off x="6675120" y="3360420"/>
+            <a:ext cx="5029200" cy="1108710"/>
           </a:xfrm>
           <a:prstGeom prst="roundRect">
             <a:avLst/>
@@ -23281,8 +24862,8 @@
         </p:nvSpPr>
         <p:spPr>
           <a:xfrm>
-            <a:off x="6675120" y="3246120"/>
-            <a:ext cx="91440" cy="1051560"/>
+            <a:off x="6675120" y="3360420"/>
+            <a:ext cx="91440" cy="1108710"/>
           </a:xfrm>
           <a:prstGeom prst="rect">
             <a:avLst/>
@@ -23324,8 +24905,8 @@
         </p:nvSpPr>
         <p:spPr>
           <a:xfrm>
-            <a:off x="6931152" y="3355848"/>
-            <a:ext cx="4617720" cy="868680"/>
+            <a:off x="6931152" y="3451860"/>
+            <a:ext cx="4617720" cy="962406"/>
           </a:xfrm>
           <a:prstGeom prst="rect">
             <a:avLst/>
@@ -23357,8 +24938,8 @@
         </p:nvSpPr>
         <p:spPr>
           <a:xfrm>
-            <a:off x="6675120" y="4389120"/>
-            <a:ext cx="5029200" cy="1051560"/>
+            <a:off x="6675120" y="4560570"/>
+            <a:ext cx="5029200" cy="1108710"/>
           </a:xfrm>
           <a:prstGeom prst="roundRect">
             <a:avLst/>
@@ -23400,8 +24981,8 @@
         </p:nvSpPr>
         <p:spPr>
           <a:xfrm>
-            <a:off x="6675120" y="4389120"/>
-            <a:ext cx="91440" cy="1051560"/>
+            <a:off x="6675120" y="4560570"/>
+            <a:ext cx="91440" cy="1108710"/>
           </a:xfrm>
           <a:prstGeom prst="rect">
             <a:avLst/>
@@ -23443,8 +25024,8 @@
         </p:nvSpPr>
         <p:spPr>
           <a:xfrm>
-            <a:off x="6931152" y="4498848"/>
-            <a:ext cx="4617720" cy="868680"/>
+            <a:off x="6931152" y="4652010"/>
+            <a:ext cx="4617720" cy="962406"/>
           </a:xfrm>
           <a:prstGeom prst="rect">
             <a:avLst/>
